--- a/slides/Lecture_10_StochasticContinuous.pptx
+++ b/slides/Lecture_10_StochasticContinuous.pptx
@@ -314,7 +314,7 @@
             <a:fld id="{05CC55C5-3AE8-4299-988D-DFB8217A9B4E}" type="datetimeFigureOut">
               <a:rPr lang="en-GB" smtClean="0"/>
               <a:pPr/>
-              <a:t>01/09/2024</a:t>
+              <a:t>03/09/2026</a:t>
             </a:fld>
             <a:endParaRPr lang="en-GB" dirty="0"/>
           </a:p>
@@ -670,7 +670,7 @@
           <a:p>
             <a:fld id="{05CC55C5-3AE8-4299-988D-DFB8217A9B4E}" type="datetimeFigureOut">
               <a:rPr lang="en-GB" smtClean="0"/>
-              <a:t>01/09/2024</a:t>
+              <a:t>03/09/2026</a:t>
             </a:fld>
             <a:endParaRPr lang="en-GB"/>
           </a:p>
@@ -2439,7 +2439,7 @@
                     <m:oMathParaPr>
                       <m:jc m:val="center"/>
                     </m:oMathParaPr>
-                    <m:oMath xmlns:m="http://schemas.openxmlformats.org/officeDocument/2006/math">
+                    <m:oMath>
                       <m:m>
                         <m:mPr>
                           <m:mcs>
@@ -2461,9 +2461,7 @@
                             <m:f>
                               <m:fPr>
                                 <m:ctrlPr>
-                                  <a:rPr i="1">
-                                    <a:latin typeface="Cambria Math" panose="02040503050406030204" pitchFamily="18" charset="0"/>
-                                  </a:rPr>
+                                  <a:rPr i="0"/>
                                 </m:ctrlPr>
                               </m:fPr>
                               <m:num>
@@ -2471,7 +2469,7 @@
                                   <m:rPr>
                                     <m:nor/>
                                   </m:rPr>
-                                  <a:rPr/>
+                                  <a:rPr i="0"/>
                                   <m:t>d</m:t>
                                 </m:r>
                                 <m:r>
@@ -2486,7 +2484,7 @@
                                   <m:rPr>
                                     <m:nor/>
                                   </m:rPr>
-                                  <a:rPr/>
+                                  <a:rPr i="0"/>
                                   <m:t>d</m:t>
                                 </m:r>
                                 <m:r>
@@ -2544,9 +2542,7 @@
                             <m:f>
                               <m:fPr>
                                 <m:ctrlPr>
-                                  <a:rPr i="1">
-                                    <a:latin typeface="Cambria Math" panose="02040503050406030204" pitchFamily="18" charset="0"/>
-                                  </a:rPr>
+                                  <a:rPr i="0"/>
                                 </m:ctrlPr>
                               </m:fPr>
                               <m:num>
@@ -2554,7 +2550,7 @@
                                   <m:rPr>
                                     <m:nor/>
                                   </m:rPr>
-                                  <a:rPr/>
+                                  <a:rPr i="0"/>
                                   <m:t>d</m:t>
                                 </m:r>
                                 <m:r>
@@ -2569,7 +2565,7 @@
                                   <m:rPr>
                                     <m:nor/>
                                   </m:rPr>
-                                  <a:rPr/>
+                                  <a:rPr i="0"/>
                                   <m:t>d</m:t>
                                 </m:r>
                                 <m:r>
@@ -2639,9 +2635,7 @@
                             <m:f>
                               <m:fPr>
                                 <m:ctrlPr>
-                                  <a:rPr i="1">
-                                    <a:latin typeface="Cambria Math" panose="02040503050406030204" pitchFamily="18" charset="0"/>
-                                  </a:rPr>
+                                  <a:rPr i="0"/>
                                 </m:ctrlPr>
                               </m:fPr>
                               <m:num>
@@ -2649,7 +2643,7 @@
                                   <m:rPr>
                                     <m:nor/>
                                   </m:rPr>
-                                  <a:rPr/>
+                                  <a:rPr i="0"/>
                                   <m:t>d</m:t>
                                 </m:r>
                                 <m:r>
@@ -2664,7 +2658,7 @@
                                   <m:rPr>
                                     <m:nor/>
                                   </m:rPr>
-                                  <a:rPr/>
+                                  <a:rPr i="0"/>
                                   <m:t>d</m:t>
                                 </m:r>
                                 <m:r>
@@ -2886,7 +2880,7 @@
                     <m:oMathParaPr>
                       <m:jc m:val="center"/>
                     </m:oMathParaPr>
-                    <m:oMath xmlns:m="http://schemas.openxmlformats.org/officeDocument/2006/math">
+                    <m:oMath>
                       <m:m>
                         <m:mPr>
                           <m:mcs>
@@ -2908,9 +2902,7 @@
                             <m:f>
                               <m:fPr>
                                 <m:ctrlPr>
-                                  <a:rPr i="1">
-                                    <a:latin typeface="Cambria Math" panose="02040503050406030204" pitchFamily="18" charset="0"/>
-                                  </a:rPr>
+                                  <a:rPr i="0"/>
                                 </m:ctrlPr>
                               </m:fPr>
                               <m:num>
@@ -2918,7 +2910,7 @@
                                   <m:rPr>
                                     <m:nor/>
                                   </m:rPr>
-                                  <a:rPr/>
+                                  <a:rPr i="0"/>
                                   <m:t>d</m:t>
                                 </m:r>
                                 <m:r>
@@ -2933,7 +2925,7 @@
                                   <m:rPr>
                                     <m:nor/>
                                   </m:rPr>
-                                  <a:rPr/>
+                                  <a:rPr i="0"/>
                                   <m:t>d</m:t>
                                 </m:r>
                                 <m:r>
@@ -2991,9 +2983,7 @@
                             <m:f>
                               <m:fPr>
                                 <m:ctrlPr>
-                                  <a:rPr i="1">
-                                    <a:latin typeface="Cambria Math" panose="02040503050406030204" pitchFamily="18" charset="0"/>
-                                  </a:rPr>
+                                  <a:rPr i="0"/>
                                 </m:ctrlPr>
                               </m:fPr>
                               <m:num>
@@ -3001,7 +2991,7 @@
                                   <m:rPr>
                                     <m:nor/>
                                   </m:rPr>
-                                  <a:rPr/>
+                                  <a:rPr i="0"/>
                                   <m:t>d</m:t>
                                 </m:r>
                                 <m:r>
@@ -3016,7 +3006,7 @@
                                   <m:rPr>
                                     <m:nor/>
                                   </m:rPr>
-                                  <a:rPr/>
+                                  <a:rPr i="0"/>
                                   <m:t>d</m:t>
                                 </m:r>
                                 <m:r>
@@ -3086,9 +3076,7 @@
                             <m:f>
                               <m:fPr>
                                 <m:ctrlPr>
-                                  <a:rPr i="1">
-                                    <a:latin typeface="Cambria Math" panose="02040503050406030204" pitchFamily="18" charset="0"/>
-                                  </a:rPr>
+                                  <a:rPr i="0"/>
                                 </m:ctrlPr>
                               </m:fPr>
                               <m:num>
@@ -3096,7 +3084,7 @@
                                   <m:rPr>
                                     <m:nor/>
                                   </m:rPr>
-                                  <a:rPr/>
+                                  <a:rPr i="0"/>
                                   <m:t>d</m:t>
                                 </m:r>
                                 <m:r>
@@ -3111,7 +3099,7 @@
                                   <m:rPr>
                                     <m:nor/>
                                   </m:rPr>
-                                  <a:rPr/>
+                                  <a:rPr i="0"/>
                                   <m:t>d</m:t>
                                 </m:r>
                                 <m:r>
@@ -4495,7 +4483,7 @@
                     <m:oMathParaPr>
                       <m:jc m:val="center"/>
                     </m:oMathParaPr>
-                    <m:oMath xmlns:m="http://schemas.openxmlformats.org/officeDocument/2006/math">
+                    <m:oMath>
                       <m:m>
                         <m:mPr>
                           <m:mcs>
@@ -4517,9 +4505,7 @@
                             <m:f>
                               <m:fPr>
                                 <m:ctrlPr>
-                                  <a:rPr i="1">
-                                    <a:latin typeface="Cambria Math" panose="02040503050406030204" pitchFamily="18" charset="0"/>
-                                  </a:rPr>
+                                  <a:rPr i="0"/>
                                 </m:ctrlPr>
                               </m:fPr>
                               <m:num>
@@ -4527,7 +4513,7 @@
                                   <m:rPr>
                                     <m:nor/>
                                   </m:rPr>
-                                  <a:rPr/>
+                                  <a:rPr i="0"/>
                                   <m:t>d</m:t>
                                 </m:r>
                                 <m:r>
@@ -4542,7 +4528,7 @@
                                   <m:rPr>
                                     <m:nor/>
                                   </m:rPr>
-                                  <a:rPr/>
+                                  <a:rPr i="0"/>
                                   <m:t>d</m:t>
                                 </m:r>
                                 <m:r>
@@ -4645,13 +4631,13 @@
                               <m:rPr>
                                 <m:nor/>
                               </m:rPr>
-                              <a:rPr/>
+                              <a:rPr i="0"/>
                               <m:t>d</m:t>
                             </m:r>
                             <m:sSub>
                               <m:sSubPr>
                                 <m:ctrlPr>
-                                  <a:rPr i="1">
+                                  <a:rPr>
                                     <a:latin typeface="Cambria Math" panose="02040503050406030204" pitchFamily="18" charset="0"/>
                                   </a:rPr>
                                 </m:ctrlPr>
@@ -4680,9 +4666,7 @@
                             <m:f>
                               <m:fPr>
                                 <m:ctrlPr>
-                                  <a:rPr i="1">
-                                    <a:latin typeface="Cambria Math" panose="02040503050406030204" pitchFamily="18" charset="0"/>
-                                  </a:rPr>
+                                  <a:rPr i="0"/>
                                 </m:ctrlPr>
                               </m:fPr>
                               <m:num>
@@ -4690,7 +4674,7 @@
                                   <m:rPr>
                                     <m:nor/>
                                   </m:rPr>
-                                  <a:rPr/>
+                                  <a:rPr i="0"/>
                                   <m:t>d</m:t>
                                 </m:r>
                                 <m:r>
@@ -4705,7 +4689,7 @@
                                   <m:rPr>
                                     <m:nor/>
                                   </m:rPr>
-                                  <a:rPr/>
+                                  <a:rPr i="0"/>
                                   <m:t>d</m:t>
                                 </m:r>
                                 <m:r>
@@ -4820,13 +4804,13 @@
                               <m:rPr>
                                 <m:nor/>
                               </m:rPr>
-                              <a:rPr/>
+                              <a:rPr i="0"/>
                               <m:t>d</m:t>
                             </m:r>
                             <m:sSub>
                               <m:sSubPr>
                                 <m:ctrlPr>
-                                  <a:rPr i="1">
+                                  <a:rPr>
                                     <a:latin typeface="Cambria Math" panose="02040503050406030204" pitchFamily="18" charset="0"/>
                                   </a:rPr>
                                 </m:ctrlPr>
@@ -4888,13 +4872,13 @@
                               <m:rPr>
                                 <m:nor/>
                               </m:rPr>
-                              <a:rPr/>
+                              <a:rPr i="0"/>
                               <m:t>d</m:t>
                             </m:r>
                             <m:sSub>
                               <m:sSubPr>
                                 <m:ctrlPr>
-                                  <a:rPr i="1">
+                                  <a:rPr>
                                     <a:latin typeface="Cambria Math" panose="02040503050406030204" pitchFamily="18" charset="0"/>
                                   </a:rPr>
                                 </m:ctrlPr>
@@ -4923,9 +4907,7 @@
                             <m:f>
                               <m:fPr>
                                 <m:ctrlPr>
-                                  <a:rPr i="1">
-                                    <a:latin typeface="Cambria Math" panose="02040503050406030204" pitchFamily="18" charset="0"/>
-                                  </a:rPr>
+                                  <a:rPr i="0"/>
                                 </m:ctrlPr>
                               </m:fPr>
                               <m:num>
@@ -4933,7 +4915,7 @@
                                   <m:rPr>
                                     <m:nor/>
                                   </m:rPr>
-                                  <a:rPr/>
+                                  <a:rPr i="0"/>
                                   <m:t>d</m:t>
                                 </m:r>
                                 <m:r>
@@ -4948,7 +4930,7 @@
                                   <m:rPr>
                                     <m:nor/>
                                   </m:rPr>
-                                  <a:rPr/>
+                                  <a:rPr i="0"/>
                                   <m:t>d</m:t>
                                 </m:r>
                                 <m:r>
@@ -5021,13 +5003,13 @@
                               <m:rPr>
                                 <m:nor/>
                               </m:rPr>
-                              <a:rPr/>
+                              <a:rPr i="0"/>
                               <m:t>d</m:t>
                             </m:r>
                             <m:sSub>
                               <m:sSubPr>
                                 <m:ctrlPr>
-                                  <a:rPr i="1">
+                                  <a:rPr>
                                     <a:latin typeface="Cambria Math" panose="02040503050406030204" pitchFamily="18" charset="0"/>
                                   </a:rPr>
                                 </m:ctrlPr>
@@ -5841,7 +5823,7 @@
                     <m:oMathParaPr>
                       <m:jc m:val="center"/>
                     </m:oMathParaPr>
-                    <m:oMath xmlns:m="http://schemas.openxmlformats.org/officeDocument/2006/math">
+                    <m:oMath>
                       <m:m>
                         <m:mPr>
                           <m:mcs>
@@ -5863,7 +5845,7 @@
                             <m:f>
                               <m:fPr>
                                 <m:ctrlPr>
-                                  <a:rPr i="1">
+                                  <a:rPr>
                                     <a:latin typeface="Cambria Math" panose="02040503050406030204" pitchFamily="18" charset="0"/>
                                   </a:rPr>
                                 </m:ctrlPr>
@@ -5926,7 +5908,7 @@
                             <m:f>
                               <m:fPr>
                                 <m:ctrlPr>
-                                  <a:rPr i="1">
+                                  <a:rPr>
                                     <a:latin typeface="Cambria Math" panose="02040503050406030204" pitchFamily="18" charset="0"/>
                                   </a:rPr>
                                 </m:ctrlPr>
@@ -5985,7 +5967,7 @@
                             <m:f>
                               <m:fPr>
                                 <m:ctrlPr>
-                                  <a:rPr i="1">
+                                  <a:rPr>
                                     <a:latin typeface="Cambria Math" panose="02040503050406030204" pitchFamily="18" charset="0"/>
                                   </a:rPr>
                                 </m:ctrlPr>
@@ -6048,7 +6030,7 @@
                             <m:f>
                               <m:fPr>
                                 <m:ctrlPr>
-                                  <a:rPr i="1">
+                                  <a:rPr>
                                     <a:latin typeface="Cambria Math" panose="02040503050406030204" pitchFamily="18" charset="0"/>
                                   </a:rPr>
                                 </m:ctrlPr>
@@ -6095,7 +6077,7 @@
                             <m:f>
                               <m:fPr>
                                 <m:ctrlPr>
-                                  <a:rPr i="1">
+                                  <a:rPr>
                                     <a:latin typeface="Cambria Math" panose="02040503050406030204" pitchFamily="18" charset="0"/>
                                   </a:rPr>
                                 </m:ctrlPr>
@@ -6180,7 +6162,7 @@
                             <m:f>
                               <m:fPr>
                                 <m:ctrlPr>
-                                  <a:rPr i="1">
+                                  <a:rPr>
                                     <a:latin typeface="Cambria Math" panose="02040503050406030204" pitchFamily="18" charset="0"/>
                                   </a:rPr>
                                 </m:ctrlPr>
@@ -6265,7 +6247,7 @@
                             <m:f>
                               <m:fPr>
                                 <m:ctrlPr>
-                                  <a:rPr i="1">
+                                  <a:rPr>
                                     <a:latin typeface="Cambria Math" panose="02040503050406030204" pitchFamily="18" charset="0"/>
                                   </a:rPr>
                                 </m:ctrlPr>
@@ -6571,7 +6553,23 @@
               <a:rPr lang="en-GB" dirty="0">
                 <a:latin typeface="Courier" pitchFamily="2" charset="0"/>
               </a:rPr>
-              <a:t> 1:steps){ … EVENTS … }</a:t>
+              <a:t> 1:steps){ </a:t>
+            </a:r>
+          </a:p>
+          <a:p>
+            <a:r>
+              <a:rPr lang="en-GB" dirty="0">
+                <a:latin typeface="Courier" pitchFamily="2" charset="0"/>
+              </a:rPr>
+              <a:t>			… EVENTS …</a:t>
+            </a:r>
+          </a:p>
+          <a:p>
+            <a:r>
+              <a:rPr lang="en-GB" dirty="0">
+                <a:latin typeface="Courier" pitchFamily="2" charset="0"/>
+              </a:rPr>
+              <a:t>		}</a:t>
             </a:r>
           </a:p>
           <a:p>
@@ -6634,7 +6632,7 @@
               <a:rPr lang="en-GB" dirty="0">
                 <a:latin typeface="Courier" pitchFamily="2" charset="0"/>
               </a:rPr>
-              <a:t>) { … </a:t>
+              <a:t>) { </a:t>
             </a:r>
           </a:p>
           <a:p>
@@ -6684,7 +6682,7 @@
               <a:rPr lang="en-GB" dirty="0">
                 <a:latin typeface="Courier" pitchFamily="2" charset="0"/>
               </a:rPr>
-              <a:t>					if (time &lt;= </a:t>
+              <a:t>			if (time &lt;= </a:t>
             </a:r>
             <a:r>
               <a:rPr lang="en-GB" dirty="0" err="1">
@@ -6696,7 +6694,7 @@
               <a:rPr lang="en-GB" dirty="0">
                 <a:latin typeface="Courier" pitchFamily="2" charset="0"/>
               </a:rPr>
-              <a:t>) { … EVENTS … }</a:t>
+              <a:t>) { </a:t>
             </a:r>
           </a:p>
           <a:p>
@@ -6704,11 +6702,24 @@
               <a:rPr lang="en-GB" dirty="0">
                 <a:latin typeface="Courier" pitchFamily="2" charset="0"/>
               </a:rPr>
+              <a:t>				… EVENTS …</a:t>
+            </a:r>
+          </a:p>
+          <a:p>
+            <a:r>
+              <a:rPr lang="en-GB" dirty="0">
+                <a:latin typeface="Courier" pitchFamily="2" charset="0"/>
+              </a:rPr>
+              <a:t>     		}</a:t>
+            </a:r>
+          </a:p>
+          <a:p>
+            <a:r>
+              <a:rPr lang="en-GB" dirty="0">
+                <a:latin typeface="Courier" pitchFamily="2" charset="0"/>
+              </a:rPr>
               <a:t>		}</a:t>
             </a:r>
-          </a:p>
-          <a:p>
-            <a:endParaRPr lang="en-US" dirty="0"/>
           </a:p>
           <a:p>
             <a:endParaRPr lang="en-US" dirty="0"/>
@@ -7710,11 +7721,23 @@
               <a:rPr sz="2100" dirty="0" err="1">
                 <a:latin typeface="Courier"/>
               </a:rPr>
-              <a:t>ssa.adaptivetau</a:t>
+              <a:t>adaptivetau</a:t>
             </a:r>
             <a:r>
               <a:rPr sz="2100" dirty="0"/>
-              <a:t> package implements this (and generates fast C code).</a:t>
+              <a:t> package implements this (</a:t>
+            </a:r>
+            <a:r>
+              <a:rPr lang="en-GB" sz="2100"/>
+              <a:t>in</a:t>
+            </a:r>
+            <a:r>
+              <a:rPr sz="2100"/>
+              <a:t> </a:t>
+            </a:r>
+            <a:r>
+              <a:rPr sz="2100" dirty="0"/>
+              <a:t>fast C code).</a:t>
             </a:r>
             <a:endParaRPr lang="en-GB" sz="2100" dirty="0"/>
           </a:p>
@@ -10558,7 +10581,7 @@
             </a:r>
             <a:r>
               <a:rPr lang="en-GB" dirty="0"/>
-              <a:t>~20 minutes</a:t>
+              <a:t>~30 minutes</a:t>
             </a:r>
             <a:r>
               <a:rPr dirty="0"/>
@@ -10636,7 +10659,7 @@
             </a:r>
             <a:r>
               <a:rPr lang="en-US" dirty="0"/>
-              <a:t>20</a:t>
+              <a:t>30</a:t>
             </a:r>
             <a:r>
               <a:rPr dirty="0"/>
@@ -10669,7 +10692,7 @@
             </a:r>
             <a:r>
               <a:rPr lang="en-US" dirty="0"/>
-              <a:t>20</a:t>
+              <a:t>30</a:t>
             </a:r>
             <a:r>
               <a:rPr dirty="0"/>
@@ -11157,7 +11180,7 @@
                     <m:oMathParaPr>
                       <m:jc m:val="center"/>
                     </m:oMathParaPr>
-                    <m:oMath xmlns:m="http://schemas.openxmlformats.org/officeDocument/2006/math">
+                    <m:oMath>
                       <m:m>
                         <m:mPr>
                           <m:mcs>
@@ -11742,7 +11765,7 @@
                     <m:oMathParaPr>
                       <m:jc m:val="center"/>
                     </m:oMathParaPr>
-                    <m:oMath xmlns:m="http://schemas.openxmlformats.org/officeDocument/2006/math">
+                    <m:oMath>
                       <m:m>
                         <m:mPr>
                           <m:mcs>
